--- a/01 Elementi Razvoja Softvera/02 Prezentacije/PPTX/02_SOLID_i_Clean_Architecture.pptx
+++ b/01 Elementi Razvoja Softvera/02 Prezentacije/PPTX/02_SOLID_i_Clean_Architecture.pptx
@@ -21924,7 +21924,7 @@
         <p:spPr>
           <a:xfrm xmlns:a="http://schemas.openxmlformats.org/drawingml/2006/main">
             <a:off x="914400" y="1600200"/>
-            <a:ext cx="10363200" cy="578358"/>
+            <a:ext cx="10363200" cy="552450"/>
           </a:xfrm>
           <a:prstGeom xmlns:a="http://schemas.openxmlformats.org/drawingml/2006/main" prst="rect">
             <a:avLst/>
@@ -21958,7 +21958,7 @@
                 <a:ea typeface="Aptos"/>
                 <a:cs typeface="Aptos"/>
               </a:rPr>
-              <a:t>Сервис оркестрира објаву преко уговора, без преузимања одговорности корисничког интерфејса, базе и логовања.</a:t>
+              <a:t>Сервис оркестрира објаву преко уговора, без одговорности интерфејса, базе и логовања.</a:t>
             </a:r>
           </a:p>
         </p:txBody>
